--- a/metro/metro-f04-open-house-today.pptx
+++ b/metro/metro-f04-open-house-today.pptx
@@ -3778,9 +3778,9 @@
                 <a:solidFill>
                   <a:srgbClr val="14161A"/>
                 </a:solidFill>
-                <a:latin typeface="Space Grotesk"/>
-                <a:ea typeface="Space Grotesk"/>
-                <a:cs typeface="Space Grotesk"/>
+                <a:latin typeface="HK Grotesk"/>
+                <a:ea typeface="HK Grotesk"/>
+                <a:cs typeface="HK Grotesk"/>
               </a:rPr>
               <a:t>NO</a:t>
             </a:r>
@@ -3817,9 +3817,9 @@
                 <a:solidFill>
                   <a:srgbClr val="14161A"/>
                 </a:solidFill>
-                <a:latin typeface="Space Grotesk"/>
-                <a:ea typeface="Space Grotesk"/>
-                <a:cs typeface="Space Grotesk"/>
+                <a:latin typeface="HK Grotesk"/>
+                <a:ea typeface="HK Grotesk"/>
+                <a:cs typeface="HK Grotesk"/>
               </a:rPr>
               <a:t>North &amp; Oak</a:t>
             </a:r>
@@ -3961,9 +3961,9 @@
                 <a:solidFill>
                   <a:srgbClr val="14161A"/>
                 </a:solidFill>
-                <a:latin typeface="Space Grotesk"/>
-                <a:ea typeface="Space Grotesk"/>
-                <a:cs typeface="Space Grotesk"/>
+                <a:latin typeface="HK Grotesk"/>
+                <a:ea typeface="HK Grotesk"/>
+                <a:cs typeface="HK Grotesk"/>
               </a:rPr>
               <a:t>Today.</a:t>
             </a:r>
@@ -4000,9 +4000,9 @@
                 <a:solidFill>
                   <a:srgbClr val="2D5BE3"/>
                 </a:solidFill>
-                <a:latin typeface="Space Grotesk"/>
-                <a:ea typeface="Space Grotesk"/>
-                <a:cs typeface="Space Grotesk"/>
+                <a:latin typeface="HK Grotesk"/>
+                <a:ea typeface="HK Grotesk"/>
+                <a:cs typeface="HK Grotesk"/>
               </a:rPr>
               <a:t>1—4PM</a:t>
             </a:r>
@@ -4035,9 +4035,9 @@
                 <a:solidFill>
                   <a:srgbClr val="14161A"/>
                 </a:solidFill>
-                <a:latin typeface="Space Grotesk"/>
-                <a:ea typeface="Space Grotesk"/>
-                <a:cs typeface="Space Grotesk"/>
+                <a:latin typeface="HK Grotesk"/>
+                <a:ea typeface="HK Grotesk"/>
+                <a:cs typeface="HK Grotesk"/>
               </a:rPr>
               <a:t>1200 N Wells, 14C</a:t>
             </a:r>
@@ -4109,9 +4109,9 @@
                 <a:solidFill>
                   <a:srgbClr val="24272E"/>
                 </a:solidFill>
-                <a:latin typeface="Space Grotesk"/>
-                <a:ea typeface="Space Grotesk"/>
-                <a:cs typeface="Space Grotesk"/>
+                <a:latin typeface="HK Grotesk"/>
+                <a:ea typeface="HK Grotesk"/>
+                <a:cs typeface="HK Grotesk"/>
               </a:rPr>
               <a:t>See it before it’s gone. Coffee on, doorman waiting.</a:t>
             </a:r>
